--- a/Training Materials/12. Design Patterns in Java/Slides/2. Understanding Design Patterns/understanding-design-patterns-slides.pptx
+++ b/Training Materials/12. Design Patterns in Java/Slides/2. Understanding Design Patterns/understanding-design-patterns-slides.pptx
@@ -264,7 +264,7 @@
           <a:p>
             <a:fld id="{E77D0875-5CB7-4B9D-9054-DA3444EA9239}" type="datetimeFigureOut">
               <a:rPr lang="en-IN" smtClean="0"/>
-              <a:t>17-09-2024</a:t>
+              <a:t>22-10-2025</a:t>
             </a:fld>
             <a:endParaRPr lang="en-IN"/>
           </a:p>
@@ -671,7 +671,7 @@
           <a:p>
             <a:fld id="{28633FB5-2BDE-4228-B09F-415C78875733}" type="datetime1">
               <a:rPr lang="en-US" smtClean="0"/>
-              <a:t>9/17/2024</a:t>
+              <a:t>10/22/2025</a:t>
             </a:fld>
             <a:endParaRPr lang="en-US"/>
           </a:p>
@@ -872,7 +872,7 @@
           <a:p>
             <a:fld id="{111A9C1B-4E55-46CD-B6C1-492E03DD813E}" type="datetime1">
               <a:rPr lang="en-US" smtClean="0"/>
-              <a:t>9/17/2024</a:t>
+              <a:t>10/22/2025</a:t>
             </a:fld>
             <a:endParaRPr lang="en-US"/>
           </a:p>
@@ -1086,7 +1086,7 @@
           <a:p>
             <a:fld id="{61A585AE-C57F-4762-9876-E97060300A5D}" type="datetime1">
               <a:rPr lang="en-US" smtClean="0"/>
-              <a:t>9/17/2024</a:t>
+              <a:t>10/22/2025</a:t>
             </a:fld>
             <a:endParaRPr lang="en-US"/>
           </a:p>
@@ -1234,7 +1234,7 @@
           <a:p>
             <a:fld id="{AC3675DD-476B-437B-A53A-C47648641403}" type="datetime1">
               <a:rPr lang="en-US" smtClean="0"/>
-              <a:t>9/17/2024</a:t>
+              <a:t>10/22/2025</a:t>
             </a:fld>
             <a:endParaRPr lang="en-US"/>
           </a:p>
@@ -1353,7 +1353,7 @@
           <a:p>
             <a:fld id="{E3BEFEBB-C3E5-4CFA-8FC1-BEC0F0BD1F4A}" type="datetime1">
               <a:rPr lang="en-US" smtClean="0"/>
-              <a:t>9/17/2024</a:t>
+              <a:t>10/22/2025</a:t>
             </a:fld>
             <a:endParaRPr lang="en-US"/>
           </a:p>
@@ -1572,7 +1572,7 @@
           <a:p>
             <a:fld id="{037F3840-9A7A-425D-A442-AFD8C618ECAC}" type="datetime1">
               <a:rPr lang="en-US" smtClean="0"/>
-              <a:t>9/17/2024</a:t>
+              <a:t>10/22/2025</a:t>
             </a:fld>
             <a:endParaRPr lang="en-US"/>
           </a:p>
@@ -3230,7 +3230,7 @@
         </p:nvSpPr>
         <p:spPr>
           <a:xfrm>
-            <a:off x="648462" y="3249929"/>
+            <a:off x="648462" y="3429000"/>
             <a:ext cx="7174865" cy="0"/>
           </a:xfrm>
           <a:custGeom>
